--- a/docs/jelentes.pptx
+++ b/docs/jelentes.pptx
@@ -350,7 +350,7 @@
             <a:fld id="{5586B75A-687E-405C-8A0B-8D00578BA2C3}" type="datetimeFigureOut">
               <a:rPr lang="en-US" dirty="0"/>
               <a:pPr/>
-              <a:t>10/18/2026</a:t>
+              <a:t>10/19/2026</a:t>
             </a:fld>
             <a:endParaRPr lang="en-US" dirty="0"/>
           </a:p>
@@ -520,7 +520,7 @@
             <a:fld id="{5586B75A-687E-405C-8A0B-8D00578BA2C3}" type="datetimeFigureOut">
               <a:rPr lang="en-US" dirty="0"/>
               <a:pPr/>
-              <a:t>10/18/2026</a:t>
+              <a:t>10/19/2026</a:t>
             </a:fld>
             <a:endParaRPr lang="en-US" dirty="0"/>
           </a:p>
@@ -700,7 +700,7 @@
             <a:fld id="{5586B75A-687E-405C-8A0B-8D00578BA2C3}" type="datetimeFigureOut">
               <a:rPr lang="en-US" dirty="0"/>
               <a:pPr/>
-              <a:t>10/18/2026</a:t>
+              <a:t>10/19/2026</a:t>
             </a:fld>
             <a:endParaRPr lang="en-US" dirty="0"/>
           </a:p>
@@ -870,7 +870,7 @@
             <a:fld id="{5586B75A-687E-405C-8A0B-8D00578BA2C3}" type="datetimeFigureOut">
               <a:rPr lang="en-US" dirty="0"/>
               <a:pPr/>
-              <a:t>10/18/2026</a:t>
+              <a:t>10/19/2026</a:t>
             </a:fld>
             <a:endParaRPr lang="en-US" dirty="0"/>
           </a:p>
@@ -1129,7 +1129,7 @@
             <a:fld id="{5586B75A-687E-405C-8A0B-8D00578BA2C3}" type="datetimeFigureOut">
               <a:rPr lang="en-US" dirty="0"/>
               <a:pPr/>
-              <a:t>10/18/2026</a:t>
+              <a:t>10/19/2026</a:t>
             </a:fld>
             <a:endParaRPr lang="en-US" dirty="0"/>
           </a:p>
@@ -1416,7 +1416,7 @@
             <a:fld id="{5586B75A-687E-405C-8A0B-8D00578BA2C3}" type="datetimeFigureOut">
               <a:rPr lang="en-US" dirty="0"/>
               <a:pPr/>
-              <a:t>10/18/2026</a:t>
+              <a:t>10/19/2026</a:t>
             </a:fld>
             <a:endParaRPr lang="en-US" dirty="0"/>
           </a:p>
@@ -1857,7 +1857,7 @@
             <a:fld id="{5586B75A-687E-405C-8A0B-8D00578BA2C3}" type="datetimeFigureOut">
               <a:rPr lang="en-US" dirty="0"/>
               <a:pPr/>
-              <a:t>10/18/2026</a:t>
+              <a:t>10/19/2026</a:t>
             </a:fld>
             <a:endParaRPr lang="en-US" dirty="0"/>
           </a:p>
@@ -1976,7 +1976,7 @@
             <a:fld id="{5586B75A-687E-405C-8A0B-8D00578BA2C3}" type="datetimeFigureOut">
               <a:rPr lang="en-US" dirty="0"/>
               <a:pPr/>
-              <a:t>10/18/2026</a:t>
+              <a:t>10/19/2026</a:t>
             </a:fld>
             <a:endParaRPr lang="en-US" dirty="0"/>
           </a:p>
@@ -2073,7 +2073,7 @@
             <a:fld id="{5586B75A-687E-405C-8A0B-8D00578BA2C3}" type="datetimeFigureOut">
               <a:rPr lang="en-US" dirty="0"/>
               <a:pPr/>
-              <a:t>10/18/2026</a:t>
+              <a:t>10/19/2026</a:t>
             </a:fld>
             <a:endParaRPr lang="en-US" dirty="0"/>
           </a:p>
@@ -2361,7 +2361,7 @@
             <a:fld id="{5586B75A-687E-405C-8A0B-8D00578BA2C3}" type="datetimeFigureOut">
               <a:rPr lang="en-US" dirty="0"/>
               <a:pPr/>
-              <a:t>10/18/2026</a:t>
+              <a:t>10/19/2026</a:t>
             </a:fld>
             <a:endParaRPr lang="en-US" dirty="0"/>
           </a:p>
@@ -2631,7 +2631,7 @@
             <a:fld id="{5586B75A-687E-405C-8A0B-8D00578BA2C3}" type="datetimeFigureOut">
               <a:rPr lang="en-US" dirty="0"/>
               <a:pPr/>
-              <a:t>10/18/2026</a:t>
+              <a:t>10/19/2026</a:t>
             </a:fld>
             <a:endParaRPr lang="en-US" dirty="0"/>
           </a:p>
@@ -2928,7 +2928,7 @@
             <a:fld id="{5586B75A-687E-405C-8A0B-8D00578BA2C3}" type="datetimeFigureOut">
               <a:rPr lang="en-US" dirty="0"/>
               <a:pPr/>
-              <a:t>10/18/2026</a:t>
+              <a:t>10/19/2026</a:t>
             </a:fld>
             <a:endParaRPr lang="en-US" dirty="0"/>
           </a:p>
@@ -3692,14 +3692,44 @@
           <a:p>
             <a:pPr algn="r"/>
             <a:r>
-              <a:rPr lang="hu-HU" sz="6000">
+              <a:rPr lang="hu-HU" sz="6000" dirty="0" err="1">
                 <a:solidFill>
                   <a:schemeClr val="accent1"/>
                 </a:solidFill>
                 <a:latin typeface="Arial"/>
                 <a:cs typeface="Arial"/>
               </a:rPr>
-              <a:t>Working souls Fejlesztési állapot összegző</a:t>
+              <a:t>Working</a:t>
+            </a:r>
+            <a:r>
+              <a:rPr lang="hu-HU" sz="6000" dirty="0">
+                <a:solidFill>
+                  <a:schemeClr val="accent1"/>
+                </a:solidFill>
+                <a:latin typeface="Arial"/>
+                <a:cs typeface="Arial"/>
+              </a:rPr>
+              <a:t> </a:t>
+            </a:r>
+            <a:r>
+              <a:rPr lang="hu-HU" sz="6000" dirty="0" err="1">
+                <a:solidFill>
+                  <a:schemeClr val="accent1"/>
+                </a:solidFill>
+                <a:latin typeface="Arial"/>
+                <a:cs typeface="Arial"/>
+              </a:rPr>
+              <a:t>Souls</a:t>
+            </a:r>
+            <a:r>
+              <a:rPr lang="hu-HU" sz="6000" dirty="0">
+                <a:solidFill>
+                  <a:schemeClr val="accent1"/>
+                </a:solidFill>
+                <a:latin typeface="Arial"/>
+                <a:cs typeface="Arial"/>
+              </a:rPr>
+              <a:t> Fejlesztési állapot összegző</a:t>
             </a:r>
           </a:p>
         </p:txBody>
@@ -3726,19 +3756,67 @@
           </a:bodyPr>
           <a:lstStyle/>
           <a:p>
-            <a:pPr algn="r"/>
-            <a:r>
-              <a:rPr lang="hu-HU" sz="1800">
+            <a:r>
+              <a:rPr lang="hu-HU" sz="1800" dirty="0">
                 <a:solidFill>
                   <a:srgbClr val="FFFFFF"/>
                 </a:solidFill>
                 <a:latin typeface="Arial"/>
                 <a:cs typeface="Arial"/>
               </a:rPr>
-              <a:t>Csapat tagok: Friedmann Máté, Prisznyák Patrik, Marton Alex Norto</a:t>
-            </a:r>
-            <a:r>
-              <a:rPr lang="hu-HU" sz="1800">
+              <a:t>Csapat tagok: </a:t>
+            </a:r>
+          </a:p>
+          <a:p>
+            <a:pPr algn="r"/>
+            <a:r>
+              <a:rPr lang="hu-HU" sz="1800" dirty="0">
+                <a:solidFill>
+                  <a:srgbClr val="FFFFFF"/>
+                </a:solidFill>
+                <a:latin typeface="Arial"/>
+                <a:cs typeface="Arial"/>
+              </a:rPr>
+              <a:t>Friedmann Máté, </a:t>
+            </a:r>
+          </a:p>
+          <a:p>
+            <a:pPr algn="r"/>
+            <a:r>
+              <a:rPr lang="hu-HU" sz="1800" dirty="0" err="1">
+                <a:solidFill>
+                  <a:srgbClr val="FFFFFF"/>
+                </a:solidFill>
+                <a:latin typeface="Arial"/>
+                <a:cs typeface="Arial"/>
+              </a:rPr>
+              <a:t>Prisznyák</a:t>
+            </a:r>
+            <a:r>
+              <a:rPr lang="hu-HU" sz="1800" dirty="0">
+                <a:solidFill>
+                  <a:srgbClr val="FFFFFF"/>
+                </a:solidFill>
+                <a:latin typeface="Arial"/>
+                <a:cs typeface="Arial"/>
+              </a:rPr>
+              <a:t> Patrik, </a:t>
+            </a:r>
+          </a:p>
+          <a:p>
+            <a:pPr algn="r"/>
+            <a:r>
+              <a:rPr lang="hu-HU" sz="1800" dirty="0">
+                <a:solidFill>
+                  <a:srgbClr val="FFFFFF"/>
+                </a:solidFill>
+                <a:latin typeface="Arial"/>
+                <a:cs typeface="Arial"/>
+              </a:rPr>
+              <a:t>Marton Alex Norto</a:t>
+            </a:r>
+            <a:r>
+              <a:rPr lang="hu-HU" sz="1800" dirty="0">
                 <a:solidFill>
                   <a:srgbClr val="FFFFFF"/>
                 </a:solidFill>
@@ -5241,20 +5319,16 @@
             <p:ph type="title"/>
           </p:nvPr>
         </p:nvSpPr>
-        <p:spPr>
-          <a:xfrm>
-            <a:off x="-2241" y="465978"/>
-            <a:ext cx="10515600" cy="1247122"/>
-          </a:xfrm>
-        </p:spPr>
-        <p:txBody>
-          <a:bodyPr>
+        <p:spPr/>
+        <p:txBody>
+          <a:bodyPr anchor="ctr">
             <a:normAutofit/>
           </a:bodyPr>
           <a:lstStyle/>
           <a:p>
-            <a:r>
-              <a:rPr lang="hu-HU" sz="4000">
+            <a:pPr algn="ctr"/>
+            <a:r>
+              <a:rPr lang="hu-HU" sz="4000" dirty="0">
                 <a:latin typeface="Arial"/>
                 <a:cs typeface="Arial"/>
               </a:rPr>
@@ -5265,10 +5339,10 @@
       </p:sp>
       <p:sp>
         <p:nvSpPr>
-          <p:cNvPr id="3" name="Tartalom helye 2">
+          <p:cNvPr id="6" name="Szöveg helye 5">
             <a:extLst>
               <a:ext uri="{FF2B5EF4-FFF2-40B4-BE49-F238E27FC236}">
-                <a16:creationId xmlns:a16="http://schemas.microsoft.com/office/drawing/2014/main" id="{F5323A17-E94B-F0E9-BC3A-E5B14149B6ED}"/>
+                <a16:creationId xmlns:a16="http://schemas.microsoft.com/office/drawing/2014/main" id="{D25CCFCC-EB9E-9E0C-8B1C-4A17EEE51690}"/>
               </a:ext>
             </a:extLst>
           </p:cNvPr>
@@ -5276,19 +5350,12 @@
             <a:spLocks noGrp="1"/>
           </p:cNvSpPr>
           <p:nvPr>
-            <p:ph idx="1"/>
-          </p:nvPr>
-        </p:nvSpPr>
-        <p:spPr>
-          <a:xfrm>
-            <a:off x="681318" y="1612713"/>
-            <a:ext cx="10515600" cy="3779838"/>
-          </a:xfrm>
-        </p:spPr>
-        <p:txBody>
-          <a:bodyPr vert="horz" lIns="91440" tIns="45720" rIns="91440" bIns="45720" rtlCol="0" anchor="t">
-            <a:normAutofit/>
-          </a:bodyPr>
+            <p:ph type="body" sz="half" idx="2"/>
+          </p:nvPr>
+        </p:nvSpPr>
+        <p:spPr/>
+        <p:txBody>
+          <a:bodyPr/>
           <a:lstStyle/>
           <a:p>
             <a:pPr marL="0" indent="0">
@@ -5299,44 +5366,56 @@
                 <a:latin typeface="Arial"/>
                 <a:cs typeface="Arial"/>
               </a:rPr>
-              <a:t>Habár backend hiányában nem lehet érdemi haladást elérni a frontend-</a:t>
-            </a:r>
-            <a:r>
-              <a:rPr lang="hu-HU">
+              <a:t>Habár backend hiányában nem lehet érdemi haladást elérni a frontend-ben már vannak terveink az oldal felépítéséhez.</a:t>
+            </a:r>
+          </a:p>
+          <a:p>
+            <a:pPr marL="0" indent="0">
+              <a:buNone/>
+            </a:pPr>
+            <a:r>
+              <a:rPr lang="hu-HU" dirty="0">
                 <a:latin typeface="Arial"/>
                 <a:cs typeface="Arial"/>
               </a:rPr>
-              <a:t>ben már vannak terveink az oldal felépítéséhez.</a:t>
-            </a:r>
-          </a:p>
-          <a:p>
-            <a:pPr marL="0" indent="0">
-              <a:buNone/>
-            </a:pPr>
-            <a:r>
-              <a:rPr lang="hu-HU">
-                <a:latin typeface="Arial"/>
-                <a:cs typeface="Arial"/>
-              </a:rPr>
-              <a:t>A lekéréseket elkezdtük megírni a backendhez. Az adatbázzis megírása lesz a következő lépésünk.</a:t>
-            </a:r>
-          </a:p>
-          <a:p>
-            <a:pPr marL="0" indent="0">
-              <a:buNone/>
-            </a:pPr>
-            <a:r>
-              <a:rPr lang="hu-HU" b="1"/>
-              <a:t>Megjegyzés Frici</a:t>
-            </a:r>
-            <a:r>
-              <a:rPr lang="hu-HU"/>
-              <a:t>: (ha be tetted a képet a diára jobb klikkel kattintva nyomj a designer-re és vélaszd ki hogy nézzen ki)</a:t>
-            </a:r>
+              <a:t>A lekéréseket elkezdtük megírni a backendhez. Az adatbázis megírása lesz a következő lépésünk.</a:t>
+            </a:r>
+          </a:p>
+          <a:p>
             <a:endParaRPr lang="hu-HU" dirty="0"/>
           </a:p>
         </p:txBody>
       </p:sp>
+      <p:pic>
+        <p:nvPicPr>
+          <p:cNvPr id="5" name="Kép 4">
+            <a:extLst>
+              <a:ext uri="{FF2B5EF4-FFF2-40B4-BE49-F238E27FC236}">
+                <a16:creationId xmlns:a16="http://schemas.microsoft.com/office/drawing/2014/main" id="{0ADC5DD4-44A7-3BA2-C3F0-A8C2F203B4F0}"/>
+              </a:ext>
+            </a:extLst>
+          </p:cNvPr>
+          <p:cNvPicPr>
+            <a:picLocks noChangeAspect="1"/>
+          </p:cNvPicPr>
+          <p:nvPr/>
+        </p:nvPicPr>
+        <p:blipFill>
+          <a:blip r:embed="rId2"/>
+          <a:stretch>
+            <a:fillRect/>
+          </a:stretch>
+        </p:blipFill>
+        <p:spPr>
+          <a:xfrm>
+            <a:off x="3498980" y="1272955"/>
+            <a:ext cx="7899963" cy="4442442"/>
+          </a:xfrm>
+          <a:prstGeom prst="rect">
+            <a:avLst/>
+          </a:prstGeom>
+        </p:spPr>
+      </p:pic>
     </p:spTree>
     <p:extLst>
       <p:ext uri="{BB962C8B-B14F-4D97-AF65-F5344CB8AC3E}">

--- a/docs/jelentes.pptx
+++ b/docs/jelentes.pptx
@@ -350,7 +350,7 @@
             <a:fld id="{5586B75A-687E-405C-8A0B-8D00578BA2C3}" type="datetimeFigureOut">
               <a:rPr lang="en-US" dirty="0"/>
               <a:pPr/>
-              <a:t>10/19/2026</a:t>
+              <a:t>10/21/2026</a:t>
             </a:fld>
             <a:endParaRPr lang="en-US" dirty="0"/>
           </a:p>
@@ -520,7 +520,7 @@
             <a:fld id="{5586B75A-687E-405C-8A0B-8D00578BA2C3}" type="datetimeFigureOut">
               <a:rPr lang="en-US" dirty="0"/>
               <a:pPr/>
-              <a:t>10/19/2026</a:t>
+              <a:t>10/21/2026</a:t>
             </a:fld>
             <a:endParaRPr lang="en-US" dirty="0"/>
           </a:p>
@@ -700,7 +700,7 @@
             <a:fld id="{5586B75A-687E-405C-8A0B-8D00578BA2C3}" type="datetimeFigureOut">
               <a:rPr lang="en-US" dirty="0"/>
               <a:pPr/>
-              <a:t>10/19/2026</a:t>
+              <a:t>10/21/2026</a:t>
             </a:fld>
             <a:endParaRPr lang="en-US" dirty="0"/>
           </a:p>
@@ -870,7 +870,7 @@
             <a:fld id="{5586B75A-687E-405C-8A0B-8D00578BA2C3}" type="datetimeFigureOut">
               <a:rPr lang="en-US" dirty="0"/>
               <a:pPr/>
-              <a:t>10/19/2026</a:t>
+              <a:t>10/21/2026</a:t>
             </a:fld>
             <a:endParaRPr lang="en-US" dirty="0"/>
           </a:p>
@@ -1129,7 +1129,7 @@
             <a:fld id="{5586B75A-687E-405C-8A0B-8D00578BA2C3}" type="datetimeFigureOut">
               <a:rPr lang="en-US" dirty="0"/>
               <a:pPr/>
-              <a:t>10/19/2026</a:t>
+              <a:t>10/21/2026</a:t>
             </a:fld>
             <a:endParaRPr lang="en-US" dirty="0"/>
           </a:p>
@@ -1416,7 +1416,7 @@
             <a:fld id="{5586B75A-687E-405C-8A0B-8D00578BA2C3}" type="datetimeFigureOut">
               <a:rPr lang="en-US" dirty="0"/>
               <a:pPr/>
-              <a:t>10/19/2026</a:t>
+              <a:t>10/21/2026</a:t>
             </a:fld>
             <a:endParaRPr lang="en-US" dirty="0"/>
           </a:p>
@@ -1857,7 +1857,7 @@
             <a:fld id="{5586B75A-687E-405C-8A0B-8D00578BA2C3}" type="datetimeFigureOut">
               <a:rPr lang="en-US" dirty="0"/>
               <a:pPr/>
-              <a:t>10/19/2026</a:t>
+              <a:t>10/21/2026</a:t>
             </a:fld>
             <a:endParaRPr lang="en-US" dirty="0"/>
           </a:p>
@@ -1976,7 +1976,7 @@
             <a:fld id="{5586B75A-687E-405C-8A0B-8D00578BA2C3}" type="datetimeFigureOut">
               <a:rPr lang="en-US" dirty="0"/>
               <a:pPr/>
-              <a:t>10/19/2026</a:t>
+              <a:t>10/21/2026</a:t>
             </a:fld>
             <a:endParaRPr lang="en-US" dirty="0"/>
           </a:p>
@@ -2073,7 +2073,7 @@
             <a:fld id="{5586B75A-687E-405C-8A0B-8D00578BA2C3}" type="datetimeFigureOut">
               <a:rPr lang="en-US" dirty="0"/>
               <a:pPr/>
-              <a:t>10/19/2026</a:t>
+              <a:t>10/21/2026</a:t>
             </a:fld>
             <a:endParaRPr lang="en-US" dirty="0"/>
           </a:p>
@@ -2361,7 +2361,7 @@
             <a:fld id="{5586B75A-687E-405C-8A0B-8D00578BA2C3}" type="datetimeFigureOut">
               <a:rPr lang="en-US" dirty="0"/>
               <a:pPr/>
-              <a:t>10/19/2026</a:t>
+              <a:t>10/21/2026</a:t>
             </a:fld>
             <a:endParaRPr lang="en-US" dirty="0"/>
           </a:p>
@@ -2631,7 +2631,7 @@
             <a:fld id="{5586B75A-687E-405C-8A0B-8D00578BA2C3}" type="datetimeFigureOut">
               <a:rPr lang="en-US" dirty="0"/>
               <a:pPr/>
-              <a:t>10/19/2026</a:t>
+              <a:t>10/21/2026</a:t>
             </a:fld>
             <a:endParaRPr lang="en-US" dirty="0"/>
           </a:p>
@@ -2928,7 +2928,7 @@
             <a:fld id="{5586B75A-687E-405C-8A0B-8D00578BA2C3}" type="datetimeFigureOut">
               <a:rPr lang="en-US" dirty="0"/>
               <a:pPr/>
-              <a:t>10/19/2026</a:t>
+              <a:t>10/21/2026</a:t>
             </a:fld>
             <a:endParaRPr lang="en-US" dirty="0"/>
           </a:p>
@@ -4483,36 +4483,6 @@
           </a:p>
         </p:txBody>
       </p:sp>
-      <p:pic>
-        <p:nvPicPr>
-          <p:cNvPr id="4" name="Kép 3">
-            <a:extLst>
-              <a:ext uri="{FF2B5EF4-FFF2-40B4-BE49-F238E27FC236}">
-                <a16:creationId xmlns:a16="http://schemas.microsoft.com/office/drawing/2014/main" id="{A6D11C40-937C-9992-E360-9BCD1C94D867}"/>
-              </a:ext>
-            </a:extLst>
-          </p:cNvPr>
-          <p:cNvPicPr>
-            <a:picLocks noChangeAspect="1"/>
-          </p:cNvPicPr>
-          <p:nvPr/>
-        </p:nvPicPr>
-        <p:blipFill>
-          <a:blip r:embed="rId2"/>
-          <a:stretch>
-            <a:fillRect/>
-          </a:stretch>
-        </p:blipFill>
-        <p:spPr>
-          <a:xfrm>
-            <a:off x="5120640" y="1053116"/>
-            <a:ext cx="6367271" cy="4743616"/>
-          </a:xfrm>
-          <a:prstGeom prst="rect">
-            <a:avLst/>
-          </a:prstGeom>
-        </p:spPr>
-      </p:pic>
       <p:sp>
         <p:nvSpPr>
           <p:cNvPr id="17" name="Rectangle 16">
@@ -4570,6 +4540,42 @@
           </a:fontRef>
         </p:style>
       </p:sp>
+      <p:pic>
+        <p:nvPicPr>
+          <p:cNvPr id="6" name="Kép 5" descr="A képen képernyőkép, fekete-fehér, kör, szöveg látható&#10;&#10;Előfordulhat, hogy a mesterséges intelligencia által létrehozott tartalom helytelen.">
+            <a:extLst>
+              <a:ext uri="{FF2B5EF4-FFF2-40B4-BE49-F238E27FC236}">
+                <a16:creationId xmlns:a16="http://schemas.microsoft.com/office/drawing/2014/main" id="{EB18EFFB-C9EB-4DBE-22CA-9D79C4D25EE5}"/>
+              </a:ext>
+            </a:extLst>
+          </p:cNvPr>
+          <p:cNvPicPr>
+            <a:picLocks noChangeAspect="1"/>
+          </p:cNvPicPr>
+          <p:nvPr/>
+        </p:nvPicPr>
+        <p:blipFill>
+          <a:blip r:embed="rId2">
+            <a:extLst>
+              <a:ext uri="{28A0092B-C50C-407E-A947-70E740481C1C}">
+                <a14:useLocalDpi xmlns:a14="http://schemas.microsoft.com/office/drawing/2010/main" val="0"/>
+              </a:ext>
+            </a:extLst>
+          </a:blip>
+          <a:stretch>
+            <a:fillRect/>
+          </a:stretch>
+        </p:blipFill>
+        <p:spPr>
+          <a:xfrm>
+            <a:off x="4804704" y="949363"/>
+            <a:ext cx="6586610" cy="5255494"/>
+          </a:xfrm>
+          <a:prstGeom prst="rect">
+            <a:avLst/>
+          </a:prstGeom>
+        </p:spPr>
+      </p:pic>
     </p:spTree>
     <p:extLst>
       <p:ext uri="{BB962C8B-B14F-4D97-AF65-F5344CB8AC3E}">
@@ -4970,39 +4976,6 @@
           </a:p>
         </p:txBody>
       </p:sp>
-      <p:pic>
-        <p:nvPicPr>
-          <p:cNvPr id="4" name="Tartalom helye 3">
-            <a:extLst>
-              <a:ext uri="{FF2B5EF4-FFF2-40B4-BE49-F238E27FC236}">
-                <a16:creationId xmlns:a16="http://schemas.microsoft.com/office/drawing/2014/main" id="{A44C2F4F-0AC1-AFAF-2FCF-E1B609435D74}"/>
-              </a:ext>
-            </a:extLst>
-          </p:cNvPr>
-          <p:cNvPicPr>
-            <a:picLocks noGrp="1" noChangeAspect="1"/>
-          </p:cNvPicPr>
-          <p:nvPr>
-            <p:ph idx="1"/>
-          </p:nvPr>
-        </p:nvPicPr>
-        <p:blipFill>
-          <a:blip r:embed="rId2"/>
-          <a:srcRect r="-442" b="-593"/>
-          <a:stretch>
-            <a:fillRect/>
-          </a:stretch>
-        </p:blipFill>
-        <p:spPr>
-          <a:xfrm>
-            <a:off x="5120640" y="1055589"/>
-            <a:ext cx="6367271" cy="4738670"/>
-          </a:xfrm>
-          <a:prstGeom prst="rect">
-            <a:avLst/>
-          </a:prstGeom>
-        </p:spPr>
-      </p:pic>
       <p:sp>
         <p:nvSpPr>
           <p:cNvPr id="20" name="Rectangle 19">
@@ -5060,6 +5033,41 @@
           </a:fontRef>
         </p:style>
       </p:sp>
+      <p:pic>
+        <p:nvPicPr>
+          <p:cNvPr id="8" name="Tartalom helye 7" descr="A képen szöveg, képernyőkép, Betűtípus, tervezés látható&#10;&#10;Előfordulhat, hogy a mesterséges intelligencia által létrehozott tartalom helytelen.">
+            <a:extLst>
+              <a:ext uri="{FF2B5EF4-FFF2-40B4-BE49-F238E27FC236}">
+                <a16:creationId xmlns:a16="http://schemas.microsoft.com/office/drawing/2014/main" id="{955A1B52-0F23-2BD3-20F5-E72B57C3222F}"/>
+              </a:ext>
+            </a:extLst>
+          </p:cNvPr>
+          <p:cNvPicPr>
+            <a:picLocks noGrp="1" noChangeAspect="1"/>
+          </p:cNvPicPr>
+          <p:nvPr>
+            <p:ph idx="1"/>
+          </p:nvPr>
+        </p:nvPicPr>
+        <p:blipFill>
+          <a:blip r:embed="rId2">
+            <a:extLst>
+              <a:ext uri="{28A0092B-C50C-407E-A947-70E740481C1C}">
+                <a14:useLocalDpi xmlns:a14="http://schemas.microsoft.com/office/drawing/2010/main" val="0"/>
+              </a:ext>
+            </a:extLst>
+          </a:blip>
+          <a:stretch>
+            <a:fillRect/>
+          </a:stretch>
+        </p:blipFill>
+        <p:spPr>
+          <a:xfrm>
+            <a:off x="4770873" y="939304"/>
+            <a:ext cx="6674239" cy="4959667"/>
+          </a:xfrm>
+        </p:spPr>
+      </p:pic>
     </p:spTree>
     <p:extLst>
       <p:ext uri="{BB962C8B-B14F-4D97-AF65-F5344CB8AC3E}">
